--- a/docs/GloriousEpiphany/20251023-汇报/1023个人汇报.pptx
+++ b/docs/GloriousEpiphany/20251023-汇报/1023个人汇报.pptx
@@ -2983,6 +2983,38 @@
               <a:rPr lang="zh-CN" altLang="en-US" sz="2000" dirty="0"/>
               <a:t>智能体工具类（夸克搜索）的单元测试</a:t>
             </a:r>
+            <a:endParaRPr lang="en-US" altLang="zh-CN" sz="2000" dirty="0"/>
+          </a:p>
+          <a:p>
+            <a:r>
+              <a:rPr lang="zh-CN" altLang="en-US" sz="2000" dirty="0"/>
+              <a:t>撰写</a:t>
+            </a:r>
+            <a:r>
+              <a:rPr lang="en-US" altLang="zh-CN" sz="2000" dirty="0"/>
+              <a:t>CSDN</a:t>
+            </a:r>
+            <a:r>
+              <a:rPr lang="zh-CN" altLang="en-US" sz="2000" dirty="0"/>
+              <a:t>博客一篇</a:t>
+            </a:r>
+            <a:r>
+              <a:rPr lang="en-US" altLang="zh-CN" sz="2000" dirty="0"/>
+              <a:t>《</a:t>
+            </a:r>
+            <a:r>
+              <a:rPr lang="en-US" altLang="zh-CN" sz="2000" dirty="0" err="1"/>
+              <a:t>agentUniverse</a:t>
+            </a:r>
+            <a:r>
+              <a:rPr lang="zh-CN" altLang="en-US" sz="2000" dirty="0"/>
+              <a:t>工具类开发指南：实现夸克搜索工具</a:t>
+            </a:r>
+            <a:r>
+              <a:rPr lang="en-US" altLang="zh-CN" sz="2000" dirty="0"/>
+              <a:t>》</a:t>
+            </a:r>
+            <a:endParaRPr lang="zh-CN" altLang="en-US" sz="2000" dirty="0"/>
           </a:p>
         </p:txBody>
       </p:sp>

--- a/docs/GloriousEpiphany/20251023-汇报/1023个人汇报.pptx
+++ b/docs/GloriousEpiphany/20251023-汇报/1023个人汇报.pptx
@@ -255,7 +255,7 @@
           <a:p>
             <a:fld id="{D997B5FA-0921-464F-AAE1-844C04324D75}" type="datetimeFigureOut">
               <a:rPr lang="zh-CN" altLang="en-US" smtClean="0"/>
-              <a:t>2025/10/23</a:t>
+              <a:t>2025/10/30</a:t>
             </a:fld>
             <a:endParaRPr lang="zh-CN" altLang="en-US"/>
           </a:p>
@@ -418,7 +418,7 @@
           <a:p>
             <a:fld id="{D997B5FA-0921-464F-AAE1-844C04324D75}" type="datetimeFigureOut">
               <a:rPr lang="zh-CN" altLang="en-US" smtClean="0"/>
-              <a:t>2025/10/23</a:t>
+              <a:t>2025/10/30</a:t>
             </a:fld>
             <a:endParaRPr lang="zh-CN" altLang="en-US"/>
           </a:p>
@@ -591,7 +591,7 @@
           <a:p>
             <a:fld id="{D997B5FA-0921-464F-AAE1-844C04324D75}" type="datetimeFigureOut">
               <a:rPr lang="zh-CN" altLang="en-US" smtClean="0"/>
-              <a:t>2025/10/23</a:t>
+              <a:t>2025/10/30</a:t>
             </a:fld>
             <a:endParaRPr lang="zh-CN" altLang="en-US"/>
           </a:p>
@@ -754,7 +754,7 @@
           <a:p>
             <a:fld id="{D997B5FA-0921-464F-AAE1-844C04324D75}" type="datetimeFigureOut">
               <a:rPr lang="zh-CN" altLang="en-US" smtClean="0"/>
-              <a:t>2025/10/23</a:t>
+              <a:t>2025/10/30</a:t>
             </a:fld>
             <a:endParaRPr lang="zh-CN" altLang="en-US"/>
           </a:p>
@@ -994,7 +994,7 @@
           <a:p>
             <a:fld id="{D997B5FA-0921-464F-AAE1-844C04324D75}" type="datetimeFigureOut">
               <a:rPr lang="zh-CN" altLang="en-US" smtClean="0"/>
-              <a:t>2025/10/23</a:t>
+              <a:t>2025/10/30</a:t>
             </a:fld>
             <a:endParaRPr lang="zh-CN" altLang="en-US"/>
           </a:p>
@@ -1218,7 +1218,7 @@
           <a:p>
             <a:fld id="{D997B5FA-0921-464F-AAE1-844C04324D75}" type="datetimeFigureOut">
               <a:rPr lang="zh-CN" altLang="en-US" smtClean="0"/>
-              <a:t>2025/10/23</a:t>
+              <a:t>2025/10/30</a:t>
             </a:fld>
             <a:endParaRPr lang="zh-CN" altLang="en-US"/>
           </a:p>
@@ -1577,7 +1577,7 @@
           <a:p>
             <a:fld id="{D997B5FA-0921-464F-AAE1-844C04324D75}" type="datetimeFigureOut">
               <a:rPr lang="zh-CN" altLang="en-US" smtClean="0"/>
-              <a:t>2025/10/23</a:t>
+              <a:t>2025/10/30</a:t>
             </a:fld>
             <a:endParaRPr lang="zh-CN" altLang="en-US"/>
           </a:p>
@@ -1689,7 +1689,7 @@
           <a:p>
             <a:fld id="{D997B5FA-0921-464F-AAE1-844C04324D75}" type="datetimeFigureOut">
               <a:rPr lang="zh-CN" altLang="en-US" smtClean="0"/>
-              <a:t>2025/10/23</a:t>
+              <a:t>2025/10/30</a:t>
             </a:fld>
             <a:endParaRPr lang="zh-CN" altLang="en-US"/>
           </a:p>
@@ -1779,7 +1779,7 @@
           <a:p>
             <a:fld id="{D997B5FA-0921-464F-AAE1-844C04324D75}" type="datetimeFigureOut">
               <a:rPr lang="zh-CN" altLang="en-US" smtClean="0"/>
-              <a:t>2025/10/23</a:t>
+              <a:t>2025/10/30</a:t>
             </a:fld>
             <a:endParaRPr lang="zh-CN" altLang="en-US"/>
           </a:p>
@@ -2049,7 +2049,7 @@
           <a:p>
             <a:fld id="{D997B5FA-0921-464F-AAE1-844C04324D75}" type="datetimeFigureOut">
               <a:rPr lang="zh-CN" altLang="en-US" smtClean="0"/>
-              <a:t>2025/10/23</a:t>
+              <a:t>2025/10/30</a:t>
             </a:fld>
             <a:endParaRPr lang="zh-CN" altLang="en-US"/>
           </a:p>
@@ -2296,7 +2296,7 @@
           <a:p>
             <a:fld id="{D997B5FA-0921-464F-AAE1-844C04324D75}" type="datetimeFigureOut">
               <a:rPr lang="zh-CN" altLang="en-US" smtClean="0"/>
-              <a:t>2025/10/23</a:t>
+              <a:t>2025/10/30</a:t>
             </a:fld>
             <a:endParaRPr lang="zh-CN" altLang="en-US"/>
           </a:p>
@@ -2502,7 +2502,7 @@
           <a:p>
             <a:fld id="{D997B5FA-0921-464F-AAE1-844C04324D75}" type="datetimeFigureOut">
               <a:rPr lang="zh-CN" altLang="en-US" smtClean="0"/>
-              <a:t>2025/10/23</a:t>
+              <a:t>2025/10/30</a:t>
             </a:fld>
             <a:endParaRPr lang="zh-CN" altLang="en-US"/>
           </a:p>
@@ -3713,7 +3713,7 @@
                 <a:latin typeface="Times New Roman" panose="02020603050405020304" pitchFamily="18" charset="0"/>
                 <a:cs typeface="Times New Roman" panose="02020603050405020304" pitchFamily="18" charset="0"/>
               </a:rPr>
-              <a:t>文件中编写单元测试代码，并进行测试。（附视频）</a:t>
+              <a:t>文件中编写单元测试代码，并进行单元测试。（附视频）</a:t>
             </a:r>
             <a:endParaRPr lang="en-US" altLang="zh-CN" sz="1800" dirty="0">
               <a:latin typeface="Times New Roman" panose="02020603050405020304" pitchFamily="18" charset="0"/>

--- a/docs/GloriousEpiphany/20251023-汇报/1023个人汇报.pptx
+++ b/docs/GloriousEpiphany/20251023-汇报/1023个人汇报.pptx
@@ -9,6 +9,7 @@
     <p:sldId id="261" r:id="rId3"/>
     <p:sldId id="264" r:id="rId4"/>
     <p:sldId id="265" r:id="rId5"/>
+    <p:sldId id="266" r:id="rId6"/>
   </p:sldIdLst>
   <p:sldSz cx="12192000" cy="6858000"/>
   <p:notesSz cx="6858000" cy="9144000"/>
@@ -3885,6 +3886,131 @@
 </p:sld>
 </file>
 
+<file path=ppt/slides/slide5.xml><?xml version="1.0" encoding="utf-8"?>
+<p:sld xmlns:a="http://schemas.openxmlformats.org/drawingml/2006/main" xmlns:r="http://schemas.openxmlformats.org/officeDocument/2006/relationships" xmlns:p="http://schemas.openxmlformats.org/presentationml/2006/main">
+  <p:cSld>
+    <p:spTree>
+      <p:nvGrpSpPr>
+        <p:cNvPr id="1" name="">
+          <a:extLst>
+            <a:ext uri="{FF2B5EF4-FFF2-40B4-BE49-F238E27FC236}">
+              <a16:creationId xmlns:a16="http://schemas.microsoft.com/office/drawing/2014/main" id="{4EAA0EF3-3914-5D07-D973-4A54FD8F2B19}"/>
+            </a:ext>
+          </a:extLst>
+        </p:cNvPr>
+        <p:cNvGrpSpPr/>
+        <p:nvPr/>
+      </p:nvGrpSpPr>
+      <p:grpSpPr>
+        <a:xfrm>
+          <a:off x="0" y="0"/>
+          <a:ext cx="0" cy="0"/>
+          <a:chOff x="0" y="0"/>
+          <a:chExt cx="0" cy="0"/>
+        </a:xfrm>
+      </p:grpSpPr>
+      <p:sp>
+        <p:nvSpPr>
+          <p:cNvPr id="2" name="标题 1">
+            <a:extLst>
+              <a:ext uri="{FF2B5EF4-FFF2-40B4-BE49-F238E27FC236}">
+                <a16:creationId xmlns:a16="http://schemas.microsoft.com/office/drawing/2014/main" id="{581445B3-9854-5778-71CA-606646E98103}"/>
+              </a:ext>
+            </a:extLst>
+          </p:cNvPr>
+          <p:cNvSpPr>
+            <a:spLocks noGrp="1"/>
+          </p:cNvSpPr>
+          <p:nvPr>
+            <p:ph type="title"/>
+          </p:nvPr>
+        </p:nvSpPr>
+        <p:spPr>
+          <a:xfrm>
+            <a:off x="838200" y="149422"/>
+            <a:ext cx="10515600" cy="1325563"/>
+          </a:xfrm>
+        </p:spPr>
+        <p:txBody>
+          <a:bodyPr>
+            <a:normAutofit/>
+          </a:bodyPr>
+          <a:lstStyle/>
+          <a:p>
+            <a:r>
+              <a:rPr lang="zh-CN" altLang="en-US" sz="2400" dirty="0"/>
+              <a:t>撰写</a:t>
+            </a:r>
+            <a:r>
+              <a:rPr lang="en-US" altLang="zh-CN" sz="2400" dirty="0"/>
+              <a:t>CSDN</a:t>
+            </a:r>
+            <a:r>
+              <a:rPr lang="zh-CN" altLang="en-US" sz="2400" dirty="0"/>
+              <a:t>博客一篇</a:t>
+            </a:r>
+            <a:r>
+              <a:rPr lang="en-US" altLang="zh-CN" sz="2400" dirty="0"/>
+              <a:t>《</a:t>
+            </a:r>
+            <a:r>
+              <a:rPr lang="en-US" altLang="zh-CN" sz="2400" dirty="0" err="1"/>
+              <a:t>agentUniverse</a:t>
+            </a:r>
+            <a:r>
+              <a:rPr lang="zh-CN" altLang="en-US" sz="2400" dirty="0"/>
+              <a:t>工具类开发指南：实现夸克搜索工具</a:t>
+            </a:r>
+            <a:r>
+              <a:rPr lang="en-US" altLang="zh-CN" sz="2400" dirty="0"/>
+              <a:t>》</a:t>
+            </a:r>
+          </a:p>
+        </p:txBody>
+      </p:sp>
+      <p:pic>
+        <p:nvPicPr>
+          <p:cNvPr id="13" name="图片 12">
+            <a:extLst>
+              <a:ext uri="{FF2B5EF4-FFF2-40B4-BE49-F238E27FC236}">
+                <a16:creationId xmlns:a16="http://schemas.microsoft.com/office/drawing/2014/main" id="{932FFE76-9421-6BF7-6A45-CF3ED6DFF35F}"/>
+              </a:ext>
+            </a:extLst>
+          </p:cNvPr>
+          <p:cNvPicPr>
+            <a:picLocks noChangeAspect="1"/>
+          </p:cNvPicPr>
+          <p:nvPr/>
+        </p:nvPicPr>
+        <p:blipFill>
+          <a:blip r:embed="rId2"/>
+          <a:stretch>
+            <a:fillRect/>
+          </a:stretch>
+        </p:blipFill>
+        <p:spPr>
+          <a:xfrm>
+            <a:off x="2058572" y="1417711"/>
+            <a:ext cx="7577798" cy="5326186"/>
+          </a:xfrm>
+          <a:prstGeom prst="rect">
+            <a:avLst/>
+          </a:prstGeom>
+        </p:spPr>
+      </p:pic>
+    </p:spTree>
+    <p:extLst>
+      <p:ext uri="{BB962C8B-B14F-4D97-AF65-F5344CB8AC3E}">
+        <p14:creationId xmlns:p14="http://schemas.microsoft.com/office/powerpoint/2010/main" val="2267762335"/>
+      </p:ext>
+    </p:extLst>
+  </p:cSld>
+  <p:clrMapOvr>
+    <a:masterClrMapping/>
+  </p:clrMapOvr>
+</p:sld>
+</file>
+
 <file path=ppt/theme/theme1.xml><?xml version="1.0" encoding="utf-8"?>
 <a:theme xmlns:a="http://schemas.openxmlformats.org/drawingml/2006/main" name="WPS">
   <a:themeElements>

--- a/docs/GloriousEpiphany/20251023-汇报/1023个人汇报.pptx
+++ b/docs/GloriousEpiphany/20251023-汇报/1023个人汇报.pptx
@@ -2956,8 +2956,8 @@
         </p:nvSpPr>
         <p:spPr>
           <a:xfrm>
-            <a:off x="1524000" y="3184166"/>
-            <a:ext cx="9144000" cy="1655762"/>
+            <a:off x="1524000" y="3184165"/>
+            <a:ext cx="9144000" cy="2335059"/>
           </a:xfrm>
         </p:spPr>
         <p:txBody>
@@ -3014,6 +3014,16 @@
             <a:r>
               <a:rPr lang="en-US" altLang="zh-CN" sz="2000" dirty="0"/>
               <a:t>》</a:t>
+            </a:r>
+          </a:p>
+          <a:p>
+            <a:r>
+              <a:rPr lang="zh-CN" altLang="en-US" sz="2000" dirty="0"/>
+              <a:t>进度：</a:t>
+            </a:r>
+            <a:r>
+              <a:rPr lang="en-US" altLang="zh-CN" sz="2000" dirty="0"/>
+              <a:t>100%</a:t>
             </a:r>
             <a:endParaRPr lang="zh-CN" altLang="en-US" sz="2000" dirty="0"/>
           </a:p>

--- a/docs/GloriousEpiphany/20251023-汇报/1023个人汇报.pptx
+++ b/docs/GloriousEpiphany/20251023-汇报/1023个人汇报.pptx
@@ -256,7 +256,7 @@
           <a:p>
             <a:fld id="{D997B5FA-0921-464F-AAE1-844C04324D75}" type="datetimeFigureOut">
               <a:rPr lang="zh-CN" altLang="en-US" smtClean="0"/>
-              <a:t>2025/10/30</a:t>
+              <a:t>2025/11/13</a:t>
             </a:fld>
             <a:endParaRPr lang="zh-CN" altLang="en-US"/>
           </a:p>
@@ -419,7 +419,7 @@
           <a:p>
             <a:fld id="{D997B5FA-0921-464F-AAE1-844C04324D75}" type="datetimeFigureOut">
               <a:rPr lang="zh-CN" altLang="en-US" smtClean="0"/>
-              <a:t>2025/10/30</a:t>
+              <a:t>2025/11/13</a:t>
             </a:fld>
             <a:endParaRPr lang="zh-CN" altLang="en-US"/>
           </a:p>
@@ -592,7 +592,7 @@
           <a:p>
             <a:fld id="{D997B5FA-0921-464F-AAE1-844C04324D75}" type="datetimeFigureOut">
               <a:rPr lang="zh-CN" altLang="en-US" smtClean="0"/>
-              <a:t>2025/10/30</a:t>
+              <a:t>2025/11/13</a:t>
             </a:fld>
             <a:endParaRPr lang="zh-CN" altLang="en-US"/>
           </a:p>
@@ -755,7 +755,7 @@
           <a:p>
             <a:fld id="{D997B5FA-0921-464F-AAE1-844C04324D75}" type="datetimeFigureOut">
               <a:rPr lang="zh-CN" altLang="en-US" smtClean="0"/>
-              <a:t>2025/10/30</a:t>
+              <a:t>2025/11/13</a:t>
             </a:fld>
             <a:endParaRPr lang="zh-CN" altLang="en-US"/>
           </a:p>
@@ -995,7 +995,7 @@
           <a:p>
             <a:fld id="{D997B5FA-0921-464F-AAE1-844C04324D75}" type="datetimeFigureOut">
               <a:rPr lang="zh-CN" altLang="en-US" smtClean="0"/>
-              <a:t>2025/10/30</a:t>
+              <a:t>2025/11/13</a:t>
             </a:fld>
             <a:endParaRPr lang="zh-CN" altLang="en-US"/>
           </a:p>
@@ -1219,7 +1219,7 @@
           <a:p>
             <a:fld id="{D997B5FA-0921-464F-AAE1-844C04324D75}" type="datetimeFigureOut">
               <a:rPr lang="zh-CN" altLang="en-US" smtClean="0"/>
-              <a:t>2025/10/30</a:t>
+              <a:t>2025/11/13</a:t>
             </a:fld>
             <a:endParaRPr lang="zh-CN" altLang="en-US"/>
           </a:p>
@@ -1578,7 +1578,7 @@
           <a:p>
             <a:fld id="{D997B5FA-0921-464F-AAE1-844C04324D75}" type="datetimeFigureOut">
               <a:rPr lang="zh-CN" altLang="en-US" smtClean="0"/>
-              <a:t>2025/10/30</a:t>
+              <a:t>2025/11/13</a:t>
             </a:fld>
             <a:endParaRPr lang="zh-CN" altLang="en-US"/>
           </a:p>
@@ -1690,7 +1690,7 @@
           <a:p>
             <a:fld id="{D997B5FA-0921-464F-AAE1-844C04324D75}" type="datetimeFigureOut">
               <a:rPr lang="zh-CN" altLang="en-US" smtClean="0"/>
-              <a:t>2025/10/30</a:t>
+              <a:t>2025/11/13</a:t>
             </a:fld>
             <a:endParaRPr lang="zh-CN" altLang="en-US"/>
           </a:p>
@@ -1780,7 +1780,7 @@
           <a:p>
             <a:fld id="{D997B5FA-0921-464F-AAE1-844C04324D75}" type="datetimeFigureOut">
               <a:rPr lang="zh-CN" altLang="en-US" smtClean="0"/>
-              <a:t>2025/10/30</a:t>
+              <a:t>2025/11/13</a:t>
             </a:fld>
             <a:endParaRPr lang="zh-CN" altLang="en-US"/>
           </a:p>
@@ -2050,7 +2050,7 @@
           <a:p>
             <a:fld id="{D997B5FA-0921-464F-AAE1-844C04324D75}" type="datetimeFigureOut">
               <a:rPr lang="zh-CN" altLang="en-US" smtClean="0"/>
-              <a:t>2025/10/30</a:t>
+              <a:t>2025/11/13</a:t>
             </a:fld>
             <a:endParaRPr lang="zh-CN" altLang="en-US"/>
           </a:p>
@@ -2297,7 +2297,7 @@
           <a:p>
             <a:fld id="{D997B5FA-0921-464F-AAE1-844C04324D75}" type="datetimeFigureOut">
               <a:rPr lang="zh-CN" altLang="en-US" smtClean="0"/>
-              <a:t>2025/10/30</a:t>
+              <a:t>2025/11/13</a:t>
             </a:fld>
             <a:endParaRPr lang="zh-CN" altLang="en-US"/>
           </a:p>
@@ -2503,7 +2503,7 @@
           <a:p>
             <a:fld id="{D997B5FA-0921-464F-AAE1-844C04324D75}" type="datetimeFigureOut">
               <a:rPr lang="zh-CN" altLang="en-US" smtClean="0"/>
-              <a:t>2025/10/30</a:t>
+              <a:t>2025/11/13</a:t>
             </a:fld>
             <a:endParaRPr lang="zh-CN" altLang="en-US"/>
           </a:p>
@@ -2957,7 +2957,7 @@
         <p:spPr>
           <a:xfrm>
             <a:off x="1524000" y="3184165"/>
-            <a:ext cx="9144000" cy="2335059"/>
+            <a:ext cx="9144000" cy="3118312"/>
           </a:xfrm>
         </p:spPr>
         <p:txBody>
@@ -3024,6 +3024,31 @@
             <a:r>
               <a:rPr lang="en-US" altLang="zh-CN" sz="2000" dirty="0"/>
               <a:t>100%</a:t>
+            </a:r>
+          </a:p>
+          <a:p>
+            <a:r>
+              <a:rPr lang="zh-CN" altLang="en-US" sz="2000" dirty="0"/>
+              <a:t>负责</a:t>
+            </a:r>
+            <a:r>
+              <a:rPr lang="en-US" altLang="zh-CN" sz="2000" dirty="0"/>
+              <a:t>V2.0.0</a:t>
+            </a:r>
+            <a:r>
+              <a:rPr lang="zh-CN" altLang="en-US" sz="2000" dirty="0"/>
+              <a:t>版本的成果物整理</a:t>
+            </a:r>
+            <a:endParaRPr lang="en-US" altLang="zh-CN" sz="2000" dirty="0"/>
+          </a:p>
+          <a:p>
+            <a:r>
+              <a:rPr lang="zh-CN" altLang="en-US" sz="2000" dirty="0"/>
+              <a:t>进度：</a:t>
+            </a:r>
+            <a:r>
+              <a:rPr lang="en-US" altLang="zh-CN" sz="2000" dirty="0"/>
+              <a:t>80%</a:t>
             </a:r>
             <a:endParaRPr lang="zh-CN" altLang="en-US" sz="2000" dirty="0"/>
           </a:p>
@@ -3293,6 +3318,9 @@
             </a:endParaRPr>
           </a:p>
           <a:p>
+            <a:pPr marL="0" indent="0">
+              <a:buNone/>
+            </a:pPr>
             <a:endParaRPr lang="en-US" altLang="zh-CN" sz="1800" dirty="0">
               <a:latin typeface="Times New Roman" panose="02020603050405020304" pitchFamily="18" charset="0"/>
               <a:cs typeface="Times New Roman" panose="02020603050405020304" pitchFamily="18" charset="0"/>
@@ -3980,10 +4008,10 @@
       </p:sp>
       <p:pic>
         <p:nvPicPr>
-          <p:cNvPr id="13" name="图片 12">
+          <p:cNvPr id="4" name="图片 3">
             <a:extLst>
               <a:ext uri="{FF2B5EF4-FFF2-40B4-BE49-F238E27FC236}">
-                <a16:creationId xmlns:a16="http://schemas.microsoft.com/office/drawing/2014/main" id="{932FFE76-9421-6BF7-6A45-CF3ED6DFF35F}"/>
+                <a16:creationId xmlns:a16="http://schemas.microsoft.com/office/drawing/2014/main" id="{C6742288-759E-54F8-9BF4-5ADDE0417F6C}"/>
               </a:ext>
             </a:extLst>
           </p:cNvPr>
@@ -3994,14 +4022,15 @@
         </p:nvPicPr>
         <p:blipFill>
           <a:blip r:embed="rId2"/>
+          <a:srcRect l="3186" t="5850" r="3588"/>
           <a:stretch>
             <a:fillRect/>
           </a:stretch>
         </p:blipFill>
         <p:spPr>
           <a:xfrm>
-            <a:off x="2058572" y="1417711"/>
-            <a:ext cx="7577798" cy="5326186"/>
+            <a:off x="1482036" y="1355105"/>
+            <a:ext cx="9021448" cy="5055074"/>
           </a:xfrm>
           <a:prstGeom prst="rect">
             <a:avLst/>

--- a/docs/GloriousEpiphany/20251023-汇报/1023个人汇报.pptx
+++ b/docs/GloriousEpiphany/20251023-汇报/1023个人汇报.pptx
@@ -3037,7 +3037,7 @@
             </a:r>
             <a:r>
               <a:rPr lang="zh-CN" altLang="en-US" sz="2000" dirty="0"/>
-              <a:t>版本的成果物整理</a:t>
+              <a:t>版本的规划，分工，以及成果物整理</a:t>
             </a:r>
             <a:endParaRPr lang="en-US" altLang="zh-CN" sz="2000" dirty="0"/>
           </a:p>

--- a/docs/GloriousEpiphany/20251023-汇报/1023个人汇报.pptx
+++ b/docs/GloriousEpiphany/20251023-汇报/1023个人汇报.pptx
@@ -3048,7 +3048,7 @@
             </a:r>
             <a:r>
               <a:rPr lang="en-US" altLang="zh-CN" sz="2000" dirty="0"/>
-              <a:t>80%</a:t>
+              <a:t>90%</a:t>
             </a:r>
             <a:endParaRPr lang="zh-CN" altLang="en-US" sz="2000" dirty="0"/>
           </a:p>
